--- a/银行流水分享_V1.3.pptx
+++ b/银行流水分享_V1.3.pptx
@@ -4973,11 +4973,17 @@
           <p:cNvGraphicFramePr>
             <a:graphicFrameLocks noGrp="1"/>
           </p:cNvGraphicFramePr>
-          <p:nvPr/>
+          <p:nvPr>
+            <p:extLst>
+              <p:ext uri="{D42A27DB-BD31-4B8C-83A1-F6EECF244321}">
+                <p14:modId xmlns:p14="http://schemas.microsoft.com/office/powerpoint/2010/main" val="2117226942"/>
+              </p:ext>
+            </p:extLst>
+          </p:nvPr>
         </p:nvGraphicFramePr>
         <p:xfrm>
           <a:off x="600015" y="3044141"/>
-          <a:ext cx="11067680" cy="1216152"/>
+          <a:ext cx="11067680" cy="1331976"/>
         </p:xfrm>
         <a:graphic>
           <a:graphicData uri="http://schemas.openxmlformats.org/drawingml/2006/table">
@@ -6172,7 +6178,7 @@
                   </a:ext>
                 </a:extLst>
               </a:tr>
-              <a:tr h="173736">
+              <a:tr h="128319">
                 <a:tc>
                   <a:txBody>
                     <a:bodyPr/>
@@ -6220,6 +6226,26 @@
                     <a:p>
                       <a:pPr algn="l"/>
                       <a:r>
+                        <a:rPr sz="700" b="0" dirty="0">
+                          <a:solidFill>
+                            <a:srgbClr val="3D3C3A"/>
+                          </a:solidFill>
+                          <a:latin typeface="微软雅黑"/>
+                          <a:ea typeface="微软雅黑"/>
+                        </a:rPr>
+                        <a:t>LMF Games &amp; Amusements</a:t>
+                      </a:r>
+                    </a:p>
+                  </a:txBody>
+                  <a:tcPr marL="27432" marR="27432" marT="9144" marB="9144"/>
+                </a:tc>
+                <a:tc>
+                  <a:txBody>
+                    <a:bodyPr/>
+                    <a:lstStyle/>
+                    <a:p>
+                      <a:pPr algn="l"/>
+                      <a:r>
                         <a:rPr sz="700" b="0">
                           <a:solidFill>
                             <a:srgbClr val="3D3C3A"/>
@@ -6227,7 +6253,7 @@
                           <a:latin typeface="微软雅黑"/>
                           <a:ea typeface="微软雅黑"/>
                         </a:rPr>
-                        <a:t>LMF Games &amp; Amusements</a:t>
+                        <a:t>商户企业</a:t>
                       </a:r>
                     </a:p>
                   </a:txBody>
@@ -6247,7 +6273,7 @@
                           <a:latin typeface="微软雅黑"/>
                           <a:ea typeface="微软雅黑"/>
                         </a:rPr>
-                        <a:t>商户企业</a:t>
+                        <a:t>消费</a:t>
                       </a:r>
                     </a:p>
                   </a:txBody>
@@ -6267,7 +6293,7 @@
                           <a:latin typeface="微软雅黑"/>
                           <a:ea typeface="微软雅黑"/>
                         </a:rPr>
-                        <a:t>消费</a:t>
+                        <a:t>Entertainment</a:t>
                       </a:r>
                     </a:p>
                   </a:txBody>
@@ -6287,7 +6313,7 @@
                           <a:latin typeface="微软雅黑"/>
                           <a:ea typeface="微软雅黑"/>
                         </a:rPr>
-                        <a:t>Entertainment</a:t>
+                        <a:t>消费支出</a:t>
                       </a:r>
                     </a:p>
                   </a:txBody>
@@ -6307,26 +6333,6 @@
                           <a:latin typeface="微软雅黑"/>
                           <a:ea typeface="微软雅黑"/>
                         </a:rPr>
-                        <a:t>消费支出</a:t>
-                      </a:r>
-                    </a:p>
-                  </a:txBody>
-                  <a:tcPr marL="27432" marR="27432" marT="9144" marB="9144"/>
-                </a:tc>
-                <a:tc>
-                  <a:txBody>
-                    <a:bodyPr/>
-                    <a:lstStyle/>
-                    <a:p>
-                      <a:pPr algn="l"/>
-                      <a:r>
-                        <a:rPr sz="700" b="0">
-                          <a:solidFill>
-                            <a:srgbClr val="3D3C3A"/>
-                          </a:solidFill>
-                          <a:latin typeface="微软雅黑"/>
-                          <a:ea typeface="微软雅黑"/>
-                        </a:rPr>
                         <a:t>A$25.00</a:t>
                       </a:r>
                     </a:p>
@@ -6340,7 +6346,7 @@
                     <a:p>
                       <a:pPr algn="l"/>
                       <a:r>
-                        <a:rPr sz="700" b="0">
+                        <a:rPr sz="700" b="0" dirty="0" err="1">
                           <a:solidFill>
                             <a:srgbClr val="3D3C3A"/>
                           </a:solidFill>
@@ -6349,6 +6355,13 @@
                         </a:rPr>
                         <a:t>商户知识库标准名匹配</a:t>
                       </a:r>
+                      <a:endParaRPr sz="700" b="0" dirty="0">
+                        <a:solidFill>
+                          <a:srgbClr val="3D3C3A"/>
+                        </a:solidFill>
+                        <a:latin typeface="微软雅黑"/>
+                        <a:ea typeface="微软雅黑"/>
+                      </a:endParaRPr>
                     </a:p>
                   </a:txBody>
                   <a:tcPr marL="27432" marR="27432" marT="9144" marB="9144"/>
@@ -7101,15 +7114,32 @@
                     <a:p>
                       <a:pPr algn="l"/>
                       <a:r>
-                        <a:rPr sz="800" b="0">
-                          <a:solidFill>
-                            <a:srgbClr val="3D3C3A"/>
-                          </a:solidFill>
-                          <a:latin typeface="微软雅黑"/>
-                          <a:ea typeface="微软雅黑"/>
-                        </a:rPr>
-                        <a:t>90 天已还金额</a:t>
-                      </a:r>
+                        <a:rPr sz="800" b="0" dirty="0">
+                          <a:solidFill>
+                            <a:srgbClr val="3D3C3A"/>
+                          </a:solidFill>
+                          <a:latin typeface="微软雅黑"/>
+                          <a:ea typeface="微软雅黑"/>
+                        </a:rPr>
+                        <a:t>90 </a:t>
+                      </a:r>
+                      <a:r>
+                        <a:rPr sz="800" b="0" dirty="0" err="1">
+                          <a:solidFill>
+                            <a:srgbClr val="3D3C3A"/>
+                          </a:solidFill>
+                          <a:latin typeface="微软雅黑"/>
+                          <a:ea typeface="微软雅黑"/>
+                        </a:rPr>
+                        <a:t>天已还金额</a:t>
+                      </a:r>
+                      <a:endParaRPr sz="800" b="0" dirty="0">
+                        <a:solidFill>
+                          <a:srgbClr val="3D3C3A"/>
+                        </a:solidFill>
+                        <a:latin typeface="微软雅黑"/>
+                        <a:ea typeface="微软雅黑"/>
+                      </a:endParaRPr>
                     </a:p>
                   </a:txBody>
                   <a:tcPr marL="27432" marR="27432" marT="9144" marB="9144"/>
@@ -7289,14 +7319,24 @@
                     <a:p>
                       <a:pPr algn="l"/>
                       <a:r>
-                        <a:rPr sz="800" b="0">
-                          <a:solidFill>
-                            <a:srgbClr val="3D3C3A"/>
-                          </a:solidFill>
-                          <a:latin typeface="微软雅黑"/>
-                          <a:ea typeface="微软雅黑"/>
-                        </a:rPr>
-                        <a:t>预计剩余期数（估算）</a:t>
+                        <a:rPr sz="800" b="0" dirty="0" err="1">
+                          <a:solidFill>
+                            <a:srgbClr val="3D3C3A"/>
+                          </a:solidFill>
+                          <a:latin typeface="微软雅黑"/>
+                          <a:ea typeface="微软雅黑"/>
+                        </a:rPr>
+                        <a:t>预计剩余期数（估算</a:t>
+                      </a:r>
+                      <a:r>
+                        <a:rPr sz="800" b="0" dirty="0">
+                          <a:solidFill>
+                            <a:srgbClr val="3D3C3A"/>
+                          </a:solidFill>
+                          <a:latin typeface="微软雅黑"/>
+                          <a:ea typeface="微软雅黑"/>
+                        </a:rPr>
+                        <a:t>）</a:t>
                       </a:r>
                     </a:p>
                   </a:txBody>
@@ -7544,14 +7584,34 @@
                     <a:p>
                       <a:pPr algn="l"/>
                       <a:r>
-                        <a:rPr sz="800" b="0">
-                          <a:solidFill>
-                            <a:srgbClr val="3D3C3A"/>
-                          </a:solidFill>
-                          <a:latin typeface="微软雅黑"/>
-                          <a:ea typeface="微软雅黑"/>
-                        </a:rPr>
-                        <a:t>【待补充】</a:t>
+                        <a:rPr sz="800" b="0" dirty="0">
+                          <a:solidFill>
+                            <a:srgbClr val="3D3C3A"/>
+                          </a:solidFill>
+                          <a:latin typeface="微软雅黑"/>
+                          <a:ea typeface="微软雅黑"/>
+                        </a:rPr>
+                        <a:t>【</a:t>
+                      </a:r>
+                      <a:r>
+                        <a:rPr sz="800" b="0" dirty="0" err="1">
+                          <a:solidFill>
+                            <a:srgbClr val="3D3C3A"/>
+                          </a:solidFill>
+                          <a:latin typeface="微软雅黑"/>
+                          <a:ea typeface="微软雅黑"/>
+                        </a:rPr>
+                        <a:t>待补充</a:t>
+                      </a:r>
+                      <a:r>
+                        <a:rPr sz="800" b="0" dirty="0">
+                          <a:solidFill>
+                            <a:srgbClr val="3D3C3A"/>
+                          </a:solidFill>
+                          <a:latin typeface="微软雅黑"/>
+                          <a:ea typeface="微软雅黑"/>
+                        </a:rPr>
+                        <a:t>】</a:t>
                       </a:r>
                     </a:p>
                   </a:txBody>
@@ -10587,14 +10647,54 @@
               </a:spcAft>
             </a:pPr>
             <a:r>
-              <a:rPr sz="900" b="0">
+              <a:rPr sz="900" b="0" dirty="0">
                 <a:solidFill>
                   <a:srgbClr val="3D3C3A"/>
                 </a:solidFill>
                 <a:latin typeface="微软雅黑"/>
                 <a:ea typeface="微软雅黑"/>
               </a:rPr>
-              <a:t>AI 不参与实时分类，而是在分类完成后，以历史分类结果和既定规则为基线（不直接对比外部标签），持续监控输出质量并驱动知识库更新。闭环分为四步：</a:t>
+              <a:t>AI </a:t>
+            </a:r>
+            <a:r>
+              <a:rPr sz="900" b="0" dirty="0" err="1">
+                <a:solidFill>
+                  <a:srgbClr val="3D3C3A"/>
+                </a:solidFill>
+                <a:latin typeface="微软雅黑"/>
+                <a:ea typeface="微软雅黑"/>
+              </a:rPr>
+              <a:t>不参与实时分类，而是在分类完成后，以历史分类结果和既定规则为基线（不直接对比外部标签</a:t>
+            </a:r>
+            <a:r>
+              <a:rPr sz="900" b="0" dirty="0">
+                <a:solidFill>
+                  <a:srgbClr val="3D3C3A"/>
+                </a:solidFill>
+                <a:latin typeface="微软雅黑"/>
+                <a:ea typeface="微软雅黑"/>
+              </a:rPr>
+              <a:t>），</a:t>
+            </a:r>
+            <a:r>
+              <a:rPr sz="900" b="0" dirty="0" err="1">
+                <a:solidFill>
+                  <a:srgbClr val="3D3C3A"/>
+                </a:solidFill>
+                <a:latin typeface="微软雅黑"/>
+                <a:ea typeface="微软雅黑"/>
+              </a:rPr>
+              <a:t>持续监控输出质量并驱动知识库更新。闭环分为四步</a:t>
+            </a:r>
+            <a:r>
+              <a:rPr sz="900" b="0" dirty="0">
+                <a:solidFill>
+                  <a:srgbClr val="3D3C3A"/>
+                </a:solidFill>
+                <a:latin typeface="微软雅黑"/>
+                <a:ea typeface="微软雅黑"/>
+              </a:rPr>
+              <a:t>：</a:t>
             </a:r>
           </a:p>
           <a:p>
@@ -10604,14 +10704,34 @@
               </a:spcAft>
             </a:pPr>
             <a:r>
-              <a:rPr sz="900" b="0">
+              <a:rPr sz="900" b="0" dirty="0">
                 <a:solidFill>
                   <a:srgbClr val="3D3C3A"/>
                 </a:solidFill>
                 <a:latin typeface="微软雅黑"/>
                 <a:ea typeface="微软雅黑"/>
               </a:rPr>
-              <a:t>① 监控：捕捉分类批量漂移、同一交易对手归类不一致、覆盖率或命中率明显下降、新描述未被任何引擎识别等异常信号。</a:t>
+              <a:t>① </a:t>
+            </a:r>
+            <a:r>
+              <a:rPr sz="900" b="0" dirty="0" err="1">
+                <a:solidFill>
+                  <a:srgbClr val="3D3C3A"/>
+                </a:solidFill>
+                <a:latin typeface="微软雅黑"/>
+                <a:ea typeface="微软雅黑"/>
+              </a:rPr>
+              <a:t>监控：捕捉分类批量漂移、同一交易对手归类不一致、覆盖率或命中率明显下降、新描述未被任何引擎识别等异常信号</a:t>
+            </a:r>
+            <a:r>
+              <a:rPr sz="900" b="0" dirty="0">
+                <a:solidFill>
+                  <a:srgbClr val="3D3C3A"/>
+                </a:solidFill>
+                <a:latin typeface="微软雅黑"/>
+                <a:ea typeface="微软雅黑"/>
+              </a:rPr>
+              <a:t>。</a:t>
             </a:r>
           </a:p>
           <a:p>
@@ -10621,14 +10741,34 @@
               </a:spcAft>
             </a:pPr>
             <a:r>
-              <a:rPr sz="900" b="0">
+              <a:rPr sz="900" b="0" dirty="0">
                 <a:solidFill>
                   <a:srgbClr val="3D3C3A"/>
                 </a:solidFill>
                 <a:latin typeface="微软雅黑"/>
                 <a:ea typeface="微软雅黑"/>
               </a:rPr>
-              <a:t>② 定位：对异常逐笔细挖交易描述、金额、方向、交易对手、命中引擎和分类依据，归类为五类原因。</a:t>
+              <a:t>② </a:t>
+            </a:r>
+            <a:r>
+              <a:rPr sz="900" b="0" dirty="0" err="1">
+                <a:solidFill>
+                  <a:srgbClr val="3D3C3A"/>
+                </a:solidFill>
+                <a:latin typeface="微软雅黑"/>
+                <a:ea typeface="微软雅黑"/>
+              </a:rPr>
+              <a:t>定位：对异常逐笔细挖交易描述、金额、方向、交易对手、命中引擎和分类依据，归类为五类原因</a:t>
+            </a:r>
+            <a:r>
+              <a:rPr sz="900" b="0" dirty="0">
+                <a:solidFill>
+                  <a:srgbClr val="3D3C3A"/>
+                </a:solidFill>
+                <a:latin typeface="微软雅黑"/>
+                <a:ea typeface="微软雅黑"/>
+              </a:rPr>
+              <a:t>。</a:t>
             </a:r>
           </a:p>
           <a:p>
@@ -10638,7 +10778,7 @@
               </a:spcAft>
             </a:pPr>
             <a:r>
-              <a:rPr sz="900" b="1">
+              <a:rPr sz="900" b="1" dirty="0" err="1">
                 <a:solidFill>
                   <a:srgbClr val="0A0A0A"/>
                 </a:solidFill>
@@ -10646,6 +10786,50 @@
                 <a:ea typeface="微软雅黑"/>
               </a:rPr>
               <a:t>五类定位原因示例</a:t>
+            </a:r>
+            <a:endParaRPr sz="900" b="1" dirty="0">
+              <a:solidFill>
+                <a:srgbClr val="0A0A0A"/>
+              </a:solidFill>
+              <a:latin typeface="微软雅黑"/>
+              <a:ea typeface="微软雅黑"/>
+            </a:endParaRPr>
+          </a:p>
+          <a:p>
+            <a:pPr>
+              <a:spcAft>
+                <a:spcPts val="300"/>
+              </a:spcAft>
+            </a:pPr>
+            <a:r>
+              <a:rPr sz="900" b="0" dirty="0">
+                <a:solidFill>
+                  <a:srgbClr val="3D3C3A"/>
+                </a:solidFill>
+                <a:latin typeface="微软雅黑"/>
+                <a:ea typeface="微软雅黑"/>
+              </a:rPr>
+              <a:t>③ </a:t>
+            </a:r>
+            <a:r>
+              <a:rPr sz="900" b="0" dirty="0" err="1">
+                <a:solidFill>
+                  <a:srgbClr val="3D3C3A"/>
+                </a:solidFill>
+                <a:latin typeface="微软雅黑"/>
+                <a:ea typeface="微软雅黑"/>
+              </a:rPr>
+              <a:t>输出：生成按优先级排序的诊断报告，直接标明问题引擎、需检查的规则、缺失的商户／关键词及应补充的知识库，供业务确认</a:t>
+            </a:r>
+            <a:r>
+              <a:rPr sz="900" b="0" dirty="0">
+                <a:solidFill>
+                  <a:srgbClr val="3D3C3A"/>
+                </a:solidFill>
+                <a:latin typeface="微软雅黑"/>
+                <a:ea typeface="微软雅黑"/>
+              </a:rPr>
+              <a:t>。</a:t>
             </a:r>
           </a:p>
           <a:p>
@@ -10655,31 +10839,124 @@
               </a:spcAft>
             </a:pPr>
             <a:r>
-              <a:rPr sz="900" b="0">
+              <a:rPr sz="900" b="0" dirty="0" err="1">
                 <a:solidFill>
                   <a:srgbClr val="3D3C3A"/>
                 </a:solidFill>
                 <a:latin typeface="微软雅黑"/>
                 <a:ea typeface="微软雅黑"/>
               </a:rPr>
-              <a:t>③ 输出：生成按优先级排序的诊断报告，直接标明问题引擎、需检查的规则、缺失的商户／关键词及应补充的知识库，供业务确认。</a:t>
+              <a:t>效果：知识库随注册商户的新增、变更、失效持续更新，并从真实交易中补齐注册数据未覆盖的支付描述和商户别名。由此形成"分类</a:t>
             </a:r>
-          </a:p>
-          <a:p>
-            <a:pPr>
-              <a:spcAft>
-                <a:spcPts val="300"/>
-              </a:spcAft>
-            </a:pPr>
             <a:r>
-              <a:rPr sz="900" b="0">
+              <a:rPr sz="900" b="0" dirty="0">
                 <a:solidFill>
                   <a:srgbClr val="3D3C3A"/>
                 </a:solidFill>
                 <a:latin typeface="微软雅黑"/>
                 <a:ea typeface="微软雅黑"/>
               </a:rPr>
-              <a:t>效果：知识库随注册商户的新增、变更、失效持续更新，并从真实交易中补齐注册数据未覆盖的支付描述和商户别名。由此形成"分类 → 监控 → 定位 → 输出 → 更新 → 再分类"的持续优化闭环。</a:t>
+              <a:t> → </a:t>
+            </a:r>
+            <a:r>
+              <a:rPr sz="900" b="0" dirty="0" err="1">
+                <a:solidFill>
+                  <a:srgbClr val="3D3C3A"/>
+                </a:solidFill>
+                <a:latin typeface="微软雅黑"/>
+                <a:ea typeface="微软雅黑"/>
+              </a:rPr>
+              <a:t>监控</a:t>
+            </a:r>
+            <a:r>
+              <a:rPr sz="900" b="0" dirty="0">
+                <a:solidFill>
+                  <a:srgbClr val="3D3C3A"/>
+                </a:solidFill>
+                <a:latin typeface="微软雅黑"/>
+                <a:ea typeface="微软雅黑"/>
+              </a:rPr>
+              <a:t> → </a:t>
+            </a:r>
+            <a:r>
+              <a:rPr sz="900" b="0" dirty="0" err="1">
+                <a:solidFill>
+                  <a:srgbClr val="3D3C3A"/>
+                </a:solidFill>
+                <a:latin typeface="微软雅黑"/>
+                <a:ea typeface="微软雅黑"/>
+              </a:rPr>
+              <a:t>定位</a:t>
+            </a:r>
+            <a:r>
+              <a:rPr sz="900" b="0" dirty="0">
+                <a:solidFill>
+                  <a:srgbClr val="3D3C3A"/>
+                </a:solidFill>
+                <a:latin typeface="微软雅黑"/>
+                <a:ea typeface="微软雅黑"/>
+              </a:rPr>
+              <a:t> → </a:t>
+            </a:r>
+            <a:r>
+              <a:rPr sz="900" b="0" dirty="0" err="1">
+                <a:solidFill>
+                  <a:srgbClr val="3D3C3A"/>
+                </a:solidFill>
+                <a:latin typeface="微软雅黑"/>
+                <a:ea typeface="微软雅黑"/>
+              </a:rPr>
+              <a:t>输出</a:t>
+            </a:r>
+            <a:r>
+              <a:rPr sz="900" b="0" dirty="0">
+                <a:solidFill>
+                  <a:srgbClr val="3D3C3A"/>
+                </a:solidFill>
+                <a:latin typeface="微软雅黑"/>
+                <a:ea typeface="微软雅黑"/>
+              </a:rPr>
+              <a:t> → </a:t>
+            </a:r>
+            <a:r>
+              <a:rPr sz="900" b="0" dirty="0" err="1">
+                <a:solidFill>
+                  <a:srgbClr val="3D3C3A"/>
+                </a:solidFill>
+                <a:latin typeface="微软雅黑"/>
+                <a:ea typeface="微软雅黑"/>
+              </a:rPr>
+              <a:t>更新</a:t>
+            </a:r>
+            <a:r>
+              <a:rPr sz="900" b="0" dirty="0">
+                <a:solidFill>
+                  <a:srgbClr val="3D3C3A"/>
+                </a:solidFill>
+                <a:latin typeface="微软雅黑"/>
+                <a:ea typeface="微软雅黑"/>
+              </a:rPr>
+              <a:t> → </a:t>
+            </a:r>
+            <a:r>
+              <a:rPr sz="900" b="0" dirty="0" err="1">
+                <a:solidFill>
+                  <a:srgbClr val="3D3C3A"/>
+                </a:solidFill>
+                <a:latin typeface="微软雅黑"/>
+                <a:ea typeface="微软雅黑"/>
+              </a:rPr>
+              <a:t>再分类"的持续优化闭环</a:t>
+            </a:r>
+            <a:r>
+              <a:rPr sz="900" b="0" dirty="0">
+                <a:solidFill>
+                  <a:srgbClr val="3D3C3A"/>
+                </a:solidFill>
+                <a:latin typeface="微软雅黑"/>
+                <a:ea typeface="微软雅黑"/>
+              </a:rPr>
+              <a:t>。</a:t>
             </a:r>
           </a:p>
         </p:txBody>
@@ -10919,15 +11196,62 @@
                     <a:p>
                       <a:pPr algn="l"/>
                       <a:r>
-                        <a:rPr sz="700" b="0">
-                          <a:solidFill>
-                            <a:srgbClr val="3D3C3A"/>
-                          </a:solidFill>
-                          <a:latin typeface="微软雅黑"/>
-                          <a:ea typeface="微软雅黑"/>
-                        </a:rPr>
-                        <a:t>新开业商户或新兴 BNPL 平台的交易描述未收录，落入 Other 或无法归集为负债流</a:t>
-                      </a:r>
+                        <a:rPr sz="700" b="0" dirty="0" err="1">
+                          <a:solidFill>
+                            <a:srgbClr val="3D3C3A"/>
+                          </a:solidFill>
+                          <a:latin typeface="微软雅黑"/>
+                          <a:ea typeface="微软雅黑"/>
+                        </a:rPr>
+                        <a:t>新开业商户或新兴</a:t>
+                      </a:r>
+                      <a:r>
+                        <a:rPr sz="700" b="0" dirty="0">
+                          <a:solidFill>
+                            <a:srgbClr val="3D3C3A"/>
+                          </a:solidFill>
+                          <a:latin typeface="微软雅黑"/>
+                          <a:ea typeface="微软雅黑"/>
+                        </a:rPr>
+                        <a:t> BNPL </a:t>
+                      </a:r>
+                      <a:r>
+                        <a:rPr sz="700" b="0" dirty="0" err="1">
+                          <a:solidFill>
+                            <a:srgbClr val="3D3C3A"/>
+                          </a:solidFill>
+                          <a:latin typeface="微软雅黑"/>
+                          <a:ea typeface="微软雅黑"/>
+                        </a:rPr>
+                        <a:t>平台的交易描述未收录，落入</a:t>
+                      </a:r>
+                      <a:r>
+                        <a:rPr sz="700" b="0" dirty="0">
+                          <a:solidFill>
+                            <a:srgbClr val="3D3C3A"/>
+                          </a:solidFill>
+                          <a:latin typeface="微软雅黑"/>
+                          <a:ea typeface="微软雅黑"/>
+                        </a:rPr>
+                        <a:t> Other </a:t>
+                      </a:r>
+                      <a:r>
+                        <a:rPr sz="700" b="0" dirty="0" err="1">
+                          <a:solidFill>
+                            <a:srgbClr val="3D3C3A"/>
+                          </a:solidFill>
+                          <a:latin typeface="微软雅黑"/>
+                          <a:ea typeface="微软雅黑"/>
+                        </a:rPr>
+                        <a:t>或无法归集为负债流</a:t>
+                      </a:r>
+                      <a:endParaRPr sz="700" b="0" dirty="0">
+                        <a:solidFill>
+                          <a:srgbClr val="3D3C3A"/>
+                        </a:solidFill>
+                        <a:latin typeface="微软雅黑"/>
+                        <a:ea typeface="微软雅黑"/>
+                      </a:endParaRPr>
                     </a:p>
                   </a:txBody>
                   <a:tcPr marL="27432" marR="27432" marT="9144" marB="9144"/>
@@ -11060,7 +11384,7 @@
                     <a:p>
                       <a:pPr algn="l"/>
                       <a:r>
-                        <a:rPr sz="700" b="0">
+                        <a:rPr sz="700" b="0" dirty="0" err="1">
                           <a:solidFill>
                             <a:srgbClr val="3D3C3A"/>
                           </a:solidFill>
@@ -11069,6 +11393,13 @@
                         </a:rPr>
                         <a:t>月初集中缴费、节假日消费高峰导致某类别占比短期上升，属正常范围，无需干预</a:t>
                       </a:r>
+                      <a:endParaRPr sz="700" b="0" dirty="0">
+                        <a:solidFill>
+                          <a:srgbClr val="3D3C3A"/>
+                        </a:solidFill>
+                        <a:latin typeface="微软雅黑"/>
+                        <a:ea typeface="微软雅黑"/>
+                      </a:endParaRPr>
                     </a:p>
                   </a:txBody>
                   <a:tcPr marL="27432" marR="27432" marT="9144" marB="9144"/>
@@ -11495,7 +11826,7 @@
                     <a:p>
                       <a:pPr algn="l"/>
                       <a:r>
-                        <a:rPr sz="700" b="0">
+                        <a:rPr sz="700" b="0" dirty="0" err="1">
                           <a:solidFill>
                             <a:srgbClr val="3D3C3A"/>
                           </a:solidFill>
@@ -11504,6 +11835,13 @@
                         </a:rPr>
                         <a:t>无需处理，持续观察</a:t>
                       </a:r>
+                      <a:endParaRPr sz="700" b="0" dirty="0">
+                        <a:solidFill>
+                          <a:srgbClr val="3D3C3A"/>
+                        </a:solidFill>
+                        <a:latin typeface="微软雅黑"/>
+                        <a:ea typeface="微软雅黑"/>
+                      </a:endParaRPr>
                     </a:p>
                   </a:txBody>
                   <a:tcPr marL="27432" marR="27432" marT="9144" marB="9144"/>
@@ -12073,7 +12411,7 @@
         </p:nvGraphicFramePr>
         <p:xfrm>
           <a:off x="4672109" y="3345834"/>
-          <a:ext cx="7460747" cy="347472"/>
+          <a:ext cx="7460747" cy="405384"/>
         </p:xfrm>
         <a:graphic>
           <a:graphicData uri="http://schemas.openxmlformats.org/drawingml/2006/table">
@@ -13221,7 +13559,7 @@
         </p:nvGraphicFramePr>
         <p:xfrm>
           <a:off x="4672109" y="5119770"/>
-          <a:ext cx="7460747" cy="694944"/>
+          <a:ext cx="7460747" cy="868680"/>
         </p:xfrm>
         <a:graphic>
           <a:graphicData uri="http://schemas.openxmlformats.org/drawingml/2006/table">
@@ -13468,7 +13806,7 @@
                     <a:p>
                       <a:pPr algn="l"/>
                       <a:r>
-                        <a:rPr sz="700" b="0">
+                        <a:rPr sz="700" b="0" dirty="0">
                           <a:solidFill>
                             <a:srgbClr val="3D3C3A"/>
                           </a:solidFill>
@@ -13595,7 +13933,7 @@
                     <a:p>
                       <a:pPr algn="l"/>
                       <a:r>
-                        <a:rPr sz="700" b="0">
+                        <a:rPr sz="700" b="0" dirty="0">
                           <a:solidFill>
                             <a:srgbClr val="3D3C3A"/>
                           </a:solidFill>
@@ -13722,6 +14060,26 @@
                     <a:p>
                       <a:pPr algn="l"/>
                       <a:r>
+                        <a:rPr sz="700" b="0" dirty="0">
+                          <a:solidFill>
+                            <a:srgbClr val="3D3C3A"/>
+                          </a:solidFill>
+                          <a:latin typeface="微软雅黑"/>
+                          <a:ea typeface="微软雅黑"/>
+                        </a:rPr>
+                        <a:t>Credit24 Repayment</a:t>
+                      </a:r>
+                    </a:p>
+                  </a:txBody>
+                  <a:tcPr marL="27432" marR="27432" marT="9144" marB="9144"/>
+                </a:tc>
+                <a:tc>
+                  <a:txBody>
+                    <a:bodyPr/>
+                    <a:lstStyle/>
+                    <a:p>
+                      <a:pPr algn="l"/>
+                      <a:r>
                         <a:rPr sz="700" b="0">
                           <a:solidFill>
                             <a:srgbClr val="3D3C3A"/>
@@ -13729,26 +14087,6 @@
                           <a:latin typeface="微软雅黑"/>
                           <a:ea typeface="微软雅黑"/>
                         </a:rPr>
-                        <a:t>Credit24 Repayment</a:t>
-                      </a:r>
-                    </a:p>
-                  </a:txBody>
-                  <a:tcPr marL="27432" marR="27432" marT="9144" marB="9144"/>
-                </a:tc>
-                <a:tc>
-                  <a:txBody>
-                    <a:bodyPr/>
-                    <a:lstStyle/>
-                    <a:p>
-                      <a:pPr algn="l"/>
-                      <a:r>
-                        <a:rPr sz="700" b="0">
-                          <a:solidFill>
-                            <a:srgbClr val="3D3C3A"/>
-                          </a:solidFill>
-                          <a:latin typeface="微软雅黑"/>
-                          <a:ea typeface="微软雅黑"/>
-                        </a:rPr>
                         <a:t>SACC Loans</a:t>
                       </a:r>
                     </a:p>
@@ -13762,14 +14100,54 @@
                     <a:p>
                       <a:pPr algn="l"/>
                       <a:r>
-                        <a:rPr sz="700" b="0">
-                          <a:solidFill>
-                            <a:srgbClr val="3D3C3A"/>
-                          </a:solidFill>
-                          <a:latin typeface="微软雅黑"/>
-                          <a:ea typeface="微软雅黑"/>
-                        </a:rPr>
-                        <a:t>Non-SACC Loans（LOC 循环授信）</a:t>
+                        <a:rPr sz="700" b="0" dirty="0">
+                          <a:solidFill>
+                            <a:srgbClr val="3D3C3A"/>
+                          </a:solidFill>
+                          <a:latin typeface="微软雅黑"/>
+                          <a:ea typeface="微软雅黑"/>
+                        </a:rPr>
+                        <a:t>Non-SACC </a:t>
+                      </a:r>
+                      <a:r>
+                        <a:rPr sz="700" b="0" dirty="0" err="1">
+                          <a:solidFill>
+                            <a:srgbClr val="3D3C3A"/>
+                          </a:solidFill>
+                          <a:latin typeface="微软雅黑"/>
+                          <a:ea typeface="微软雅黑"/>
+                        </a:rPr>
+                        <a:t>Loans（LOC</a:t>
+                      </a:r>
+                      <a:r>
+                        <a:rPr sz="700" b="0" dirty="0">
+                          <a:solidFill>
+                            <a:srgbClr val="3D3C3A"/>
+                          </a:solidFill>
+                          <a:latin typeface="微软雅黑"/>
+                          <a:ea typeface="微软雅黑"/>
+                        </a:rPr>
+                        <a:t> </a:t>
+                      </a:r>
+                      <a:r>
+                        <a:rPr sz="700" b="0" dirty="0" err="1">
+                          <a:solidFill>
+                            <a:srgbClr val="3D3C3A"/>
+                          </a:solidFill>
+                          <a:latin typeface="微软雅黑"/>
+                          <a:ea typeface="微软雅黑"/>
+                        </a:rPr>
+                        <a:t>循环授信</a:t>
+                      </a:r>
+                      <a:r>
+                        <a:rPr sz="700" b="0" dirty="0">
+                          <a:solidFill>
+                            <a:srgbClr val="3D3C3A"/>
+                          </a:solidFill>
+                          <a:latin typeface="微软雅黑"/>
+                          <a:ea typeface="微软雅黑"/>
+                        </a:rPr>
+                        <a:t>）</a:t>
                       </a:r>
                     </a:p>
                   </a:txBody>
